--- a/chapter2/parts/part-06-probability-sampling/clip.pptx
+++ b/chapter2/parts/part-06-probability-sampling/clip.pptx
@@ -4242,7 +4242,7 @@
               </a:defRPr>
             </a:pPr>
             <a:r>
-              <a:t>Chapter 2 — 06 Probability Sampling</a:t>
+              <a:t>Chapter 2 — Probability Sampling</a:t>
             </a:r>
           </a:p>
         </p:txBody>
@@ -4401,7 +4401,7 @@
               </a:defRPr>
             </a:pPr>
             <a:r>
-              <a:t>Chapter 2 — 06 Probability Sampling</a:t>
+              <a:t>Chapter 2 — Probability Sampling</a:t>
             </a:r>
           </a:p>
         </p:txBody>
@@ -4580,7 +4580,7 @@
               </a:defRPr>
             </a:pPr>
             <a:r>
-              <a:t>Chapter 2 — 06 Probability Sampling</a:t>
+              <a:t>Chapter 2 — Probability Sampling</a:t>
             </a:r>
           </a:p>
         </p:txBody>
@@ -4779,7 +4779,7 @@
               </a:defRPr>
             </a:pPr>
             <a:r>
-              <a:t>Chapter 2 — 06 Probability Sampling</a:t>
+              <a:t>Chapter 2 — Probability Sampling</a:t>
             </a:r>
           </a:p>
         </p:txBody>
@@ -4978,7 +4978,7 @@
               </a:defRPr>
             </a:pPr>
             <a:r>
-              <a:t>Chapter 2 — 06 Probability Sampling</a:t>
+              <a:t>Chapter 2 — Probability Sampling</a:t>
             </a:r>
           </a:p>
         </p:txBody>
@@ -5217,7 +5217,7 @@
               </a:defRPr>
             </a:pPr>
             <a:r>
-              <a:t>Chapter 2 — 06 Probability Sampling</a:t>
+              <a:t>Chapter 2 — Probability Sampling</a:t>
             </a:r>
           </a:p>
         </p:txBody>
@@ -5396,7 +5396,7 @@
               </a:defRPr>
             </a:pPr>
             <a:r>
-              <a:t>Chapter 2 — 06 Probability Sampling</a:t>
+              <a:t>Chapter 2 — Probability Sampling</a:t>
             </a:r>
           </a:p>
         </p:txBody>
@@ -5635,7 +5635,7 @@
               </a:defRPr>
             </a:pPr>
             <a:r>
-              <a:t>Chapter 2 — 06 Probability Sampling</a:t>
+              <a:t>Chapter 2 — Probability Sampling</a:t>
             </a:r>
           </a:p>
         </p:txBody>
@@ -5834,7 +5834,7 @@
               </a:defRPr>
             </a:pPr>
             <a:r>
-              <a:t>Chapter 2 — 06 Probability Sampling</a:t>
+              <a:t>Chapter 2 — Probability Sampling</a:t>
             </a:r>
           </a:p>
         </p:txBody>
@@ -6033,7 +6033,7 @@
               </a:defRPr>
             </a:pPr>
             <a:r>
-              <a:t>Chapter 2 — 06 Probability Sampling</a:t>
+              <a:t>Chapter 2 — Probability Sampling</a:t>
             </a:r>
           </a:p>
         </p:txBody>

--- a/chapter2/parts/part-06-probability-sampling/clip.pptx
+++ b/chapter2/parts/part-06-probability-sampling/clip.pptx
@@ -4326,10 +4326,12 @@
           </a:bodyPr>
           <a:lstStyle/>
           <a:p>
-            <a:pPr>
+            <a:pPr lvl="0" marL="457200" indent="-228600">
+              <a:buFont typeface="Calibri"/>
               <a:spcAft>
                 <a:spcPts val="1000"/>
               </a:spcAft>
+              <a:buSzPct val="100000"/>
               <a:buChar char="•"/>
               <a:lnSpc>
                 <a:spcPts val="2200"/>
@@ -4346,10 +4348,12 @@
             </a:r>
           </a:p>
           <a:p>
-            <a:pPr>
+            <a:pPr lvl="0" marL="457200" indent="-228600">
+              <a:buFont typeface="Calibri"/>
               <a:spcAft>
                 <a:spcPts val="1000"/>
               </a:spcAft>
+              <a:buSzPct val="100000"/>
               <a:buChar char="•"/>
               <a:lnSpc>
                 <a:spcPts val="2200"/>
@@ -4485,10 +4489,12 @@
           </a:bodyPr>
           <a:lstStyle/>
           <a:p>
-            <a:pPr>
+            <a:pPr lvl="0" marL="457200" indent="-228600">
+              <a:buFont typeface="Calibri"/>
               <a:spcAft>
                 <a:spcPts val="1000"/>
               </a:spcAft>
+              <a:buSzPct val="100000"/>
               <a:buChar char="•"/>
               <a:lnSpc>
                 <a:spcPts val="2200"/>
@@ -4505,10 +4511,12 @@
             </a:r>
           </a:p>
           <a:p>
-            <a:pPr>
+            <a:pPr lvl="0" marL="457200" indent="-228600">
+              <a:buFont typeface="Calibri"/>
               <a:spcAft>
                 <a:spcPts val="1000"/>
               </a:spcAft>
+              <a:buSzPct val="100000"/>
               <a:buChar char="•"/>
               <a:lnSpc>
                 <a:spcPts val="2200"/>
@@ -4525,10 +4533,12 @@
             </a:r>
           </a:p>
           <a:p>
-            <a:pPr>
+            <a:pPr lvl="0" marL="457200" indent="-228600">
+              <a:buFont typeface="Calibri"/>
               <a:spcAft>
                 <a:spcPts val="1000"/>
               </a:spcAft>
+              <a:buSzPct val="100000"/>
               <a:buChar char="•"/>
               <a:lnSpc>
                 <a:spcPts val="2200"/>
@@ -4664,10 +4674,12 @@
           </a:bodyPr>
           <a:lstStyle/>
           <a:p>
-            <a:pPr>
+            <a:pPr lvl="0" marL="457200" indent="-228600">
+              <a:buFont typeface="Calibri"/>
               <a:spcAft>
                 <a:spcPts val="1000"/>
               </a:spcAft>
+              <a:buSzPct val="100000"/>
               <a:buChar char="•"/>
               <a:lnSpc>
                 <a:spcPts val="2200"/>
@@ -4684,10 +4696,12 @@
             </a:r>
           </a:p>
           <a:p>
-            <a:pPr>
+            <a:pPr lvl="0" marL="457200" indent="-228600">
+              <a:buFont typeface="Calibri"/>
               <a:spcAft>
                 <a:spcPts val="1000"/>
               </a:spcAft>
+              <a:buSzPct val="100000"/>
               <a:buChar char="•"/>
               <a:lnSpc>
                 <a:spcPts val="2200"/>
@@ -4704,10 +4718,12 @@
             </a:r>
           </a:p>
           <a:p>
-            <a:pPr>
+            <a:pPr lvl="0" marL="457200" indent="-228600">
+              <a:buFont typeface="Calibri"/>
               <a:spcAft>
                 <a:spcPts val="1000"/>
               </a:spcAft>
+              <a:buSzPct val="100000"/>
               <a:buChar char="•"/>
               <a:lnSpc>
                 <a:spcPts val="2200"/>
@@ -4724,10 +4740,12 @@
             </a:r>
           </a:p>
           <a:p>
-            <a:pPr>
+            <a:pPr lvl="0" marL="457200" indent="-228600">
+              <a:buFont typeface="Calibri"/>
               <a:spcAft>
                 <a:spcPts val="1000"/>
               </a:spcAft>
+              <a:buSzPct val="100000"/>
               <a:buChar char="•"/>
               <a:lnSpc>
                 <a:spcPts val="2200"/>
@@ -4863,10 +4881,12 @@
           </a:bodyPr>
           <a:lstStyle/>
           <a:p>
-            <a:pPr>
+            <a:pPr lvl="0" marL="457200" indent="-228600">
+              <a:buFont typeface="Calibri"/>
               <a:spcAft>
                 <a:spcPts val="1000"/>
               </a:spcAft>
+              <a:buSzPct val="100000"/>
               <a:buChar char="•"/>
               <a:lnSpc>
                 <a:spcPts val="2200"/>
@@ -4883,10 +4903,12 @@
             </a:r>
           </a:p>
           <a:p>
-            <a:pPr>
+            <a:pPr lvl="0" marL="457200" indent="-228600">
+              <a:buFont typeface="Calibri"/>
               <a:spcAft>
                 <a:spcPts val="1000"/>
               </a:spcAft>
+              <a:buSzPct val="100000"/>
               <a:buChar char="•"/>
               <a:lnSpc>
                 <a:spcPts val="2200"/>
@@ -4903,10 +4925,12 @@
             </a:r>
           </a:p>
           <a:p>
-            <a:pPr>
+            <a:pPr lvl="0" marL="457200" indent="-228600">
+              <a:buFont typeface="Calibri"/>
               <a:spcAft>
                 <a:spcPts val="1000"/>
               </a:spcAft>
+              <a:buSzPct val="100000"/>
               <a:buChar char="•"/>
               <a:lnSpc>
                 <a:spcPts val="2200"/>
@@ -4923,10 +4947,12 @@
             </a:r>
           </a:p>
           <a:p>
-            <a:pPr>
+            <a:pPr lvl="0" marL="457200" indent="-228600">
+              <a:buFont typeface="Calibri"/>
               <a:spcAft>
                 <a:spcPts val="1000"/>
               </a:spcAft>
+              <a:buSzPct val="100000"/>
               <a:buChar char="•"/>
               <a:lnSpc>
                 <a:spcPts val="2200"/>
@@ -5062,10 +5088,12 @@
           </a:bodyPr>
           <a:lstStyle/>
           <a:p>
-            <a:pPr>
+            <a:pPr lvl="0" marL="457200" indent="-228600">
+              <a:buFont typeface="Calibri"/>
               <a:spcAft>
                 <a:spcPts val="1000"/>
               </a:spcAft>
+              <a:buSzPct val="100000"/>
               <a:buChar char="•"/>
               <a:lnSpc>
                 <a:spcPts val="2200"/>
@@ -5082,10 +5110,12 @@
             </a:r>
           </a:p>
           <a:p>
-            <a:pPr>
+            <a:pPr lvl="0" marL="457200" indent="-228600">
+              <a:buFont typeface="Calibri"/>
               <a:spcAft>
                 <a:spcPts val="1000"/>
               </a:spcAft>
+              <a:buSzPct val="100000"/>
               <a:buChar char="•"/>
               <a:lnSpc>
                 <a:spcPts val="2200"/>
@@ -5102,10 +5132,12 @@
             </a:r>
           </a:p>
           <a:p>
-            <a:pPr>
+            <a:pPr lvl="0" marL="457200" indent="-228600">
+              <a:buFont typeface="Calibri"/>
               <a:spcAft>
                 <a:spcPts val="1000"/>
               </a:spcAft>
+              <a:buSzPct val="100000"/>
               <a:buChar char="•"/>
               <a:lnSpc>
                 <a:spcPts val="2200"/>
@@ -5122,10 +5154,12 @@
             </a:r>
           </a:p>
           <a:p>
-            <a:pPr>
+            <a:pPr lvl="0" marL="457200" indent="-228600">
+              <a:buFont typeface="Calibri"/>
               <a:spcAft>
                 <a:spcPts val="1000"/>
               </a:spcAft>
+              <a:buSzPct val="100000"/>
               <a:buChar char="•"/>
               <a:lnSpc>
                 <a:spcPts val="2200"/>
@@ -5142,10 +5176,12 @@
             </a:r>
           </a:p>
           <a:p>
-            <a:pPr>
+            <a:pPr lvl="0" marL="457200" indent="-228600">
+              <a:buFont typeface="Calibri"/>
               <a:spcAft>
                 <a:spcPts val="1000"/>
               </a:spcAft>
+              <a:buSzPct val="100000"/>
               <a:buChar char="•"/>
               <a:lnSpc>
                 <a:spcPts val="2200"/>
@@ -5162,10 +5198,12 @@
             </a:r>
           </a:p>
           <a:p>
-            <a:pPr>
+            <a:pPr lvl="0" marL="457200" indent="-228600">
+              <a:buFont typeface="Calibri"/>
               <a:spcAft>
                 <a:spcPts val="1000"/>
               </a:spcAft>
+              <a:buSzPct val="100000"/>
               <a:buChar char="•"/>
               <a:lnSpc>
                 <a:spcPts val="2200"/>
@@ -5301,10 +5339,12 @@
           </a:bodyPr>
           <a:lstStyle/>
           <a:p>
-            <a:pPr>
+            <a:pPr lvl="0" marL="457200" indent="-228600">
+              <a:buFont typeface="Calibri"/>
               <a:spcAft>
                 <a:spcPts val="1000"/>
               </a:spcAft>
+              <a:buSzPct val="100000"/>
               <a:buChar char="•"/>
               <a:lnSpc>
                 <a:spcPts val="2200"/>
@@ -5321,10 +5361,12 @@
             </a:r>
           </a:p>
           <a:p>
-            <a:pPr>
+            <a:pPr lvl="0" marL="457200" indent="-228600">
+              <a:buFont typeface="Calibri"/>
               <a:spcAft>
                 <a:spcPts val="1000"/>
               </a:spcAft>
+              <a:buSzPct val="100000"/>
               <a:buChar char="•"/>
               <a:lnSpc>
                 <a:spcPts val="2200"/>
@@ -5341,10 +5383,12 @@
             </a:r>
           </a:p>
           <a:p>
-            <a:pPr>
+            <a:pPr lvl="0" marL="457200" indent="-228600">
+              <a:buFont typeface="Calibri"/>
               <a:spcAft>
                 <a:spcPts val="1000"/>
               </a:spcAft>
+              <a:buSzPct val="100000"/>
               <a:buChar char="•"/>
               <a:lnSpc>
                 <a:spcPts val="2200"/>
@@ -5480,10 +5524,12 @@
           </a:bodyPr>
           <a:lstStyle/>
           <a:p>
-            <a:pPr>
+            <a:pPr lvl="0" marL="457200" indent="-228600">
+              <a:buFont typeface="Calibri"/>
               <a:spcAft>
                 <a:spcPts val="1000"/>
               </a:spcAft>
+              <a:buSzPct val="100000"/>
               <a:buChar char="•"/>
               <a:lnSpc>
                 <a:spcPts val="2200"/>
@@ -5500,10 +5546,12 @@
             </a:r>
           </a:p>
           <a:p>
-            <a:pPr>
+            <a:pPr lvl="0" marL="457200" indent="-228600">
+              <a:buFont typeface="Calibri"/>
               <a:spcAft>
                 <a:spcPts val="1000"/>
               </a:spcAft>
+              <a:buSzPct val="100000"/>
               <a:buChar char="•"/>
               <a:lnSpc>
                 <a:spcPts val="2200"/>
@@ -5520,10 +5568,12 @@
             </a:r>
           </a:p>
           <a:p>
-            <a:pPr>
+            <a:pPr lvl="0" marL="457200" indent="-228600">
+              <a:buFont typeface="Calibri"/>
               <a:spcAft>
                 <a:spcPts val="1000"/>
               </a:spcAft>
+              <a:buSzPct val="100000"/>
               <a:buChar char="•"/>
               <a:lnSpc>
                 <a:spcPts val="2200"/>
@@ -5540,10 +5590,12 @@
             </a:r>
           </a:p>
           <a:p>
-            <a:pPr>
+            <a:pPr lvl="0" marL="457200" indent="-228600">
+              <a:buFont typeface="Calibri"/>
               <a:spcAft>
                 <a:spcPts val="1000"/>
               </a:spcAft>
+              <a:buSzPct val="100000"/>
               <a:buChar char="•"/>
               <a:lnSpc>
                 <a:spcPts val="2200"/>
@@ -5560,10 +5612,12 @@
             </a:r>
           </a:p>
           <a:p>
-            <a:pPr>
+            <a:pPr lvl="0" marL="457200" indent="-228600">
+              <a:buFont typeface="Calibri"/>
               <a:spcAft>
                 <a:spcPts val="1000"/>
               </a:spcAft>
+              <a:buSzPct val="100000"/>
               <a:buChar char="•"/>
               <a:lnSpc>
                 <a:spcPts val="2200"/>
@@ -5580,10 +5634,12 @@
             </a:r>
           </a:p>
           <a:p>
-            <a:pPr>
+            <a:pPr lvl="0" marL="457200" indent="-228600">
+              <a:buFont typeface="Calibri"/>
               <a:spcAft>
                 <a:spcPts val="1000"/>
               </a:spcAft>
+              <a:buSzPct val="100000"/>
               <a:buChar char="•"/>
               <a:lnSpc>
                 <a:spcPts val="2200"/>
@@ -5719,10 +5775,12 @@
           </a:bodyPr>
           <a:lstStyle/>
           <a:p>
-            <a:pPr>
+            <a:pPr lvl="0" marL="457200" indent="-228600">
+              <a:buFont typeface="Calibri"/>
               <a:spcAft>
                 <a:spcPts val="1000"/>
               </a:spcAft>
+              <a:buSzPct val="100000"/>
               <a:buChar char="•"/>
               <a:lnSpc>
                 <a:spcPts val="2200"/>
@@ -5739,10 +5797,12 @@
             </a:r>
           </a:p>
           <a:p>
-            <a:pPr>
+            <a:pPr lvl="0" marL="457200" indent="-228600">
+              <a:buFont typeface="Calibri"/>
               <a:spcAft>
                 <a:spcPts val="1000"/>
               </a:spcAft>
+              <a:buSzPct val="100000"/>
               <a:buChar char="•"/>
               <a:lnSpc>
                 <a:spcPts val="2200"/>
@@ -5759,10 +5819,12 @@
             </a:r>
           </a:p>
           <a:p>
-            <a:pPr>
+            <a:pPr lvl="0" marL="457200" indent="-228600">
+              <a:buFont typeface="Calibri"/>
               <a:spcAft>
                 <a:spcPts val="1000"/>
               </a:spcAft>
+              <a:buSzPct val="100000"/>
               <a:buChar char="•"/>
               <a:lnSpc>
                 <a:spcPts val="2200"/>
@@ -5779,10 +5841,12 @@
             </a:r>
           </a:p>
           <a:p>
-            <a:pPr>
+            <a:pPr lvl="0" marL="457200" indent="-228600">
+              <a:buFont typeface="Calibri"/>
               <a:spcAft>
                 <a:spcPts val="1000"/>
               </a:spcAft>
+              <a:buSzPct val="100000"/>
               <a:buChar char="•"/>
               <a:lnSpc>
                 <a:spcPts val="2200"/>
@@ -5918,10 +5982,12 @@
           </a:bodyPr>
           <a:lstStyle/>
           <a:p>
-            <a:pPr>
+            <a:pPr lvl="0" marL="457200" indent="-228600">
+              <a:buFont typeface="Calibri"/>
               <a:spcAft>
                 <a:spcPts val="1000"/>
               </a:spcAft>
+              <a:buSzPct val="100000"/>
               <a:buChar char="•"/>
               <a:lnSpc>
                 <a:spcPts val="2200"/>
@@ -5938,10 +6004,12 @@
             </a:r>
           </a:p>
           <a:p>
-            <a:pPr>
+            <a:pPr lvl="0" marL="457200" indent="-228600">
+              <a:buFont typeface="Calibri"/>
               <a:spcAft>
                 <a:spcPts val="1000"/>
               </a:spcAft>
+              <a:buSzPct val="100000"/>
               <a:buChar char="•"/>
               <a:lnSpc>
                 <a:spcPts val="2200"/>
@@ -5958,10 +6026,12 @@
             </a:r>
           </a:p>
           <a:p>
-            <a:pPr>
+            <a:pPr lvl="0" marL="457200" indent="-228600">
+              <a:buFont typeface="Calibri"/>
               <a:spcAft>
                 <a:spcPts val="1000"/>
               </a:spcAft>
+              <a:buSzPct val="100000"/>
               <a:buChar char="•"/>
               <a:lnSpc>
                 <a:spcPts val="2200"/>
@@ -5978,10 +6048,12 @@
             </a:r>
           </a:p>
           <a:p>
-            <a:pPr>
+            <a:pPr lvl="0" marL="457200" indent="-228600">
+              <a:buFont typeface="Calibri"/>
               <a:spcAft>
                 <a:spcPts val="1000"/>
               </a:spcAft>
+              <a:buSzPct val="100000"/>
               <a:buChar char="•"/>
               <a:lnSpc>
                 <a:spcPts val="2200"/>
